--- a/decks/Mitsue Project Presentation.pptx
+++ b/decks/Mitsue Project Presentation.pptx
@@ -2440,7 +2440,7 @@
                 </a:solidFill>
                 <a:latin typeface="Arial"/>
               </a:rPr>
-              <a:t>Where we are today, May 2026. Phase 0, intentionally quiet. Initial meetings with the Vice Mayor and the local forestry group are done. The charter and implementation plan are drafted. The phase and funding-gate flowchart is published. T</a:t>
+              <a:t>Where we are today, September 2026. Phase 0, intentionally quiet. Meetings with the Vice Mayor, the Forest Cooperative, Mitsue Kanko, and more trees/Tenkawa are done. The charter, implementation plan, and EVM plan are drafted. A GX地域共創 decarbonization subsidy inquiry is submitted. T</a:t>
             </a:r>
             <a:r>
               <a:rPr lang="en-US" sz="2000" b="0" u="none" strike="noStrike">
@@ -2449,7 +2449,7 @@
                 </a:solidFill>
                 <a:latin typeface="Arial"/>
               </a:rPr>
-              <a:t>hree advisors have committed: Joi Ito, Ray Ozzie and Takuo Dome. And we have a project manager. Next thirty days: approach a Japanese co-founder, meet the Village Mayor, consult administrative scriveners in Nara, finalize the bilingual charter for distribution.</a:t>
+              <a:t>he advisory board has grown to eleven, including three pro bono legal advisors — among them Ray Ozzie and Takuo Dome. We're keeping the Village Mayor informed by dropping off project documents, not holding a formal meeting, and a NAIST seminar is confirmed for January 13, 2027. Next: close the Japanese co-founder search, finalize the 一般社団法人Mitsue-it bylaws, and apply to the GX地域共創 Round 2 by November 30th.</a:t>
             </a:r>
             <a:endParaRPr lang="en-US" sz="2000" b="0" u="none" strike="noStrike">
               <a:solidFill>
@@ -3271,7 +3271,7 @@
                 <a:latin typeface="Courier New"/>
                 <a:ea typeface="Courier New"/>
               </a:rPr>
-              <a:t>FOUNDATION · MAY </a:t>
+              <a:t>FOUNDATION · SEP </a:t>
             </a:r>
             <a:r>
               <a:rPr lang="en-US" sz="1800" b="0" u="none" strike="noStrike" spc="145">
@@ -3617,7 +3617,7 @@
                 <a:latin typeface="Courier New"/>
                 <a:ea typeface="Courier New"/>
               </a:rPr>
-              <a:t>01 / 11</a:t>
+              <a:t>01 / 12</a:t>
             </a:r>
             <a:endParaRPr lang="en-US" sz="1800" b="0" u="none" strike="noStrike">
               <a:solidFill>
@@ -3675,7 +3675,7 @@
                 <a:latin typeface="Courier New"/>
                 <a:ea typeface="Courier New"/>
               </a:rPr>
-              <a:t>FOREST · EV </a:t>
+              <a:t>FOREST · BIOMASS </a:t>
             </a:r>
             <a:r>
               <a:rPr lang="en-US" sz="1800" b="0" u="none" strike="noStrike" spc="145">
@@ -3685,7 +3685,7 @@
                 <a:latin typeface="Courier New"/>
                 <a:ea typeface="Courier New"/>
               </a:rPr>
-              <a:t>POWER · AI</a:t>
+              <a:t>CHP · AI</a:t>
             </a:r>
             <a:endParaRPr lang="en-US" sz="1800" b="0" u="none" strike="noStrike">
               <a:solidFill>
@@ -4349,7 +4349,7 @@
                 <a:latin typeface="Arial"/>
                 <a:ea typeface="Arial"/>
               </a:rPr>
-              <a:t>M 1–3 · ¥0–0.5M</a:t>
+              <a:t>M 1–3 · ¥0.25M</a:t>
             </a:r>
             <a:endParaRPr lang="en-US" sz="1800" b="0" u="none" strike="noStrike">
               <a:solidFill>
@@ -4570,7 +4570,7 @@
                 <a:latin typeface="Arial"/>
                 <a:ea typeface="Arial"/>
               </a:rPr>
-              <a:t>M 4–9 · ¥3–8M</a:t>
+              <a:t>M 4–9 · ¥5.5M</a:t>
             </a:r>
             <a:endParaRPr lang="en-US" sz="1800" b="0" u="none" strike="noStrike">
               <a:solidFill>
@@ -4791,7 +4791,7 @@
                 <a:latin typeface="Arial"/>
                 <a:ea typeface="Arial"/>
               </a:rPr>
-              <a:t>M 10–18 · ¥15–30M</a:t>
+              <a:t>M 10–18 · ¥22.25M</a:t>
             </a:r>
             <a:endParaRPr lang="en-US" sz="1800" b="0" u="none" strike="noStrike">
               <a:solidFill>
@@ -5012,7 +5012,7 @@
                 <a:latin typeface="Arial"/>
                 <a:ea typeface="Arial"/>
               </a:rPr>
-              <a:t>M 19–30 · ¥80–200M</a:t>
+              <a:t>M 19–30 · ¥177M</a:t>
             </a:r>
             <a:endParaRPr lang="en-US" sz="1800" b="0" u="none" strike="noStrike">
               <a:solidFill>
@@ -5407,7 +5407,7 @@
                 <a:latin typeface="Courier New"/>
                 <a:ea typeface="Courier New"/>
               </a:rPr>
-              <a:t>G3 · ¥80–200M</a:t>
+              <a:t>G3 · ¥120–290M</a:t>
             </a:r>
             <a:endParaRPr lang="en-US" sz="1800" b="0" u="none" strike="noStrike">
               <a:solidFill>
@@ -5523,7 +5523,7 @@
                 <a:latin typeface="Courier New"/>
                 <a:ea typeface="Courier New"/>
               </a:rPr>
-              <a:t>FIVE-LAYER FUNDING STACK · YEAR-3 TARGET ≈ ¥134M</a:t>
+              <a:t>FIVE-LAYER FUNDING STACK · TARGET ≈ ¥192M · ¥0 SECURED</a:t>
             </a:r>
             <a:endParaRPr lang="en-US" sz="1800" b="0" u="none" strike="noStrike">
               <a:solidFill>
@@ -5741,7 +5741,7 @@
                 <a:latin typeface="Arial"/>
                 <a:ea typeface="Arial"/>
               </a:rPr>
-              <a:t>Yr 1</a:t>
+              <a:t>Target</a:t>
             </a:r>
             <a:endParaRPr lang="en-US" sz="1800" b="0" u="none" strike="noStrike">
               <a:solidFill>
@@ -5799,7 +5799,7 @@
                 <a:latin typeface="Arial"/>
                 <a:ea typeface="Arial"/>
               </a:rPr>
-              <a:t>Yr 3</a:t>
+              <a:t>Secured</a:t>
             </a:r>
             <a:endParaRPr lang="en-US" sz="1800" b="0" u="none" strike="noStrike">
               <a:solidFill>
@@ -6019,7 +6019,7 @@
                 <a:latin typeface="Courier New"/>
                 <a:ea typeface="Courier New"/>
               </a:rPr>
-              <a:t>¥3M</a:t>
+              <a:t>¥6M</a:t>
             </a:r>
             <a:endParaRPr lang="en-US" sz="1800" b="0" u="none" strike="noStrike">
               <a:solidFill>
@@ -6077,7 +6077,7 @@
                 <a:latin typeface="Courier New"/>
                 <a:ea typeface="Courier New"/>
               </a:rPr>
-              <a:t>¥1M</a:t>
+              <a:t>¥0</a:t>
             </a:r>
             <a:endParaRPr lang="en-US" sz="1800" b="0" u="none" strike="noStrike">
               <a:solidFill>
@@ -6297,7 +6297,7 @@
                 <a:latin typeface="Courier New"/>
                 <a:ea typeface="Courier New"/>
               </a:rPr>
-              <a:t>¥5M</a:t>
+              <a:t>¥115M</a:t>
             </a:r>
             <a:endParaRPr lang="en-US" sz="1800" b="0" u="none" strike="noStrike">
               <a:solidFill>
@@ -6355,7 +6355,7 @@
                 <a:latin typeface="Courier New"/>
                 <a:ea typeface="Courier New"/>
               </a:rPr>
-              <a:t>¥80M</a:t>
+              <a:t>¥0</a:t>
             </a:r>
             <a:endParaRPr lang="en-US" sz="1800" b="0" u="none" strike="noStrike">
               <a:solidFill>
@@ -6575,7 +6575,7 @@
                 <a:latin typeface="Courier New"/>
                 <a:ea typeface="Courier New"/>
               </a:rPr>
-              <a:t>¥3M</a:t>
+              <a:t>¥33M</a:t>
             </a:r>
             <a:endParaRPr lang="en-US" sz="1800" b="0" u="none" strike="noStrike">
               <a:solidFill>
@@ -6633,7 +6633,7 @@
                 <a:latin typeface="Courier New"/>
                 <a:ea typeface="Courier New"/>
               </a:rPr>
-              <a:t>¥20M</a:t>
+              <a:t>¥0</a:t>
             </a:r>
             <a:endParaRPr lang="en-US" sz="1800" b="0" u="none" strike="noStrike">
               <a:solidFill>
@@ -6853,7 +6853,7 @@
                 <a:latin typeface="Courier New"/>
                 <a:ea typeface="Courier New"/>
               </a:rPr>
-              <a:t>¥0</a:t>
+              <a:t>¥35M</a:t>
             </a:r>
             <a:endParaRPr lang="en-US" sz="1800" b="0" u="none" strike="noStrike">
               <a:solidFill>
@@ -6911,7 +6911,7 @@
                 <a:latin typeface="Courier New"/>
                 <a:ea typeface="Courier New"/>
               </a:rPr>
-              <a:t>¥30M</a:t>
+              <a:t>¥0</a:t>
             </a:r>
             <a:endParaRPr lang="en-US" sz="1800" b="0" u="none" strike="noStrike">
               <a:solidFill>
@@ -7131,7 +7131,7 @@
                 <a:latin typeface="Courier New"/>
                 <a:ea typeface="Courier New"/>
               </a:rPr>
-              <a:t>¥0</a:t>
+              <a:t>¥3M</a:t>
             </a:r>
             <a:endParaRPr lang="en-US" sz="1800" b="0" u="none" strike="noStrike">
               <a:solidFill>
@@ -7189,7 +7189,7 @@
                 <a:latin typeface="Courier New"/>
                 <a:ea typeface="Courier New"/>
               </a:rPr>
-              <a:t>¥3M</a:t>
+              <a:t>¥0</a:t>
             </a:r>
             <a:endParaRPr lang="en-US" sz="1800" b="0" u="none" strike="noStrike">
               <a:solidFill>
@@ -7363,7 +7363,7 @@
                 <a:latin typeface="Courier New"/>
                 <a:ea typeface="Courier New"/>
               </a:rPr>
-              <a:t>¥11M</a:t>
+              <a:t>¥192M</a:t>
             </a:r>
             <a:endParaRPr lang="en-US" sz="1800" b="0" u="none" strike="noStrike">
               <a:solidFill>
@@ -7421,7 +7421,7 @@
                 <a:latin typeface="Courier New"/>
                 <a:ea typeface="Courier New"/>
               </a:rPr>
-              <a:t>¥134M</a:t>
+              <a:t>¥0</a:t>
             </a:r>
             <a:endParaRPr lang="en-US" sz="1800" b="0" u="none" strike="noStrike">
               <a:solidFill>
@@ -7885,7 +7885,7 @@
                 <a:latin typeface="Courier New"/>
                 <a:ea typeface="Courier New"/>
               </a:rPr>
-              <a:t>10 / 11</a:t>
+              <a:t>10 / 12</a:t>
             </a:r>
             <a:endParaRPr lang="en-US" sz="1800" b="0" u="none" strike="noStrike">
               <a:solidFill>
@@ -8205,7 +8205,7 @@
                 <a:latin typeface="Courier New"/>
                 <a:ea typeface="Courier New"/>
               </a:rPr>
-              <a:t>§ 11 · VILLAGE RE PLAN</a:t>
+              <a:t>§ 10 · VILLAGE RE PLAN</a:t>
             </a:r>
             <a:endParaRPr lang="en-US" sz="1800" b="0" u="none" strike="noStrike">
               <a:solidFill>
@@ -8977,7 +8977,7 @@
                 <a:latin typeface="Courier New"/>
                 <a:ea typeface="Courier New"/>
               </a:rPr>
-              <a:t>12 / 12</a:t>
+              <a:t>11 / 12</a:t>
             </a:r>
             <a:endParaRPr lang="en-US" sz="1800" b="0" u="none" strike="noStrike">
               <a:solidFill>
@@ -9383,7 +9383,7 @@
                 <a:latin typeface="Courier New"/>
                 <a:ea typeface="Courier New"/>
               </a:rPr>
-              <a:t>§ 10 · FOR PEOPLE WHO THINK IN DECADES</a:t>
+              <a:t>§ 11 · FOR PEOPLE WHO THINK IN DECADES</a:t>
             </a:r>
             <a:endParaRPr lang="en-US" sz="1800" b="0" u="none" strike="noStrike">
               <a:solidFill>
@@ -10286,7 +10286,7 @@
                 <a:latin typeface="Courier New"/>
                 <a:ea typeface="Courier New"/>
               </a:rPr>
-              <a:t>11 / 11</a:t>
+              <a:t>12 / 12</a:t>
             </a:r>
             <a:endParaRPr lang="en-US" sz="1800" b="0" u="none" strike="noStrike">
               <a:solidFill>
@@ -11821,7 +11821,7 @@
                 <a:latin typeface="Courier New"/>
                 <a:ea typeface="Courier New"/>
               </a:rPr>
-              <a:t>02 / 11</a:t>
+              <a:t>02 / 12</a:t>
             </a:r>
             <a:endParaRPr lang="en-US" sz="1800" b="0" u="none" strike="noStrike">
               <a:solidFill>
@@ -12991,7 +12991,7 @@
                 <a:latin typeface="Georgia"/>
                 <a:ea typeface="Georgia"/>
               </a:rPr>
-              <a:t>The old school building just sits there.</a:t>
+              <a:t>Vacant village buildings just sit there.</a:t>
             </a:r>
             <a:endParaRPr lang="en-US" sz="3000" b="0" u="none" strike="noStrike">
               <a:solidFill>
@@ -13049,7 +13049,7 @@
                 <a:latin typeface="Arial"/>
                 <a:ea typeface="Arial"/>
               </a:rPr>
-              <a:t>Vacant school buildings cost shrinking municipalities money to maintain. Productive reuse turns them into community anchors.</a:t>
+              <a:t>Vacant schools and factories cost shrinking municipalities money to maintain. Productive reuse turns them into community anchors.</a:t>
             </a:r>
             <a:endParaRPr lang="en-US" sz="1800" b="0" u="none" strike="noStrike">
               <a:solidFill>
@@ -13349,7 +13349,7 @@
                 <a:latin typeface="Courier New"/>
                 <a:ea typeface="Courier New"/>
               </a:rPr>
-              <a:t>03 / 11</a:t>
+              <a:t>03 / 12</a:t>
             </a:r>
             <a:endParaRPr lang="en-US" sz="1800" b="0" u="none" strike="noStrike">
               <a:solidFill>
@@ -14391,7 +14391,7 @@
                 <a:latin typeface="Arial"/>
                 <a:ea typeface="Arial"/>
               </a:rPr>
-              <a:t>Vacant school building, repurposed. Small enough that the village owns it.</a:t>
+              <a:t>A small, village-owned site — several vacant buildings under consideration.</a:t>
             </a:r>
             <a:endParaRPr lang="en-US" sz="1800" b="0" u="none" strike="noStrike">
               <a:solidFill>
@@ -14451,7 +14451,7 @@
                 <a:latin typeface="Courier New"/>
                 <a:ea typeface="Courier New"/>
               </a:rPr>
-              <a:t>04 / 11</a:t>
+              <a:t>04 / 12</a:t>
             </a:r>
             <a:endParaRPr lang="en-US" sz="1800" b="0" u="none" strike="noStrike">
               <a:solidFill>
@@ -14963,7 +14963,7 @@
                 <a:latin typeface="Arial"/>
                 <a:ea typeface="Arial"/>
               </a:rPr>
-              <a:t>The sugi we remove doesn't go to waste — it becomes the village's primary biomass fuel. The forest pays for its own restoration.</a:t>
+              <a:t>The sugi we remove doesn't go to waste — it fuels biomass CHP + the data center. That revenue funds higher landowner payouts and the co-op's mechanized equipment.</a:t>
             </a:r>
             <a:endParaRPr lang="en-US" sz="2100" b="0" u="none" strike="noStrike">
               <a:solidFill>
@@ -15821,7 +15821,7 @@
                 <a:latin typeface="Courier New"/>
                 <a:ea typeface="Courier New"/>
               </a:rPr>
-              <a:t>05 / 11</a:t>
+              <a:t>05 / 12</a:t>
             </a:r>
             <a:endParaRPr lang="en-US" sz="1800" b="0" u="none" strike="noStrike">
               <a:solidFill>
@@ -16412,7 +16412,7 @@
                 <a:latin typeface="Courier New"/>
                 <a:ea typeface="Courier New"/>
               </a:rPr>
-              <a:t>06 / 11</a:t>
+              <a:t>06 / 12</a:t>
             </a:r>
             <a:endParaRPr lang="en-US" sz="1800" b="0" u="none" strike="noStrike">
               <a:solidFill>
@@ -16888,7 +16888,7 @@
                 <a:latin typeface="Arial"/>
                 <a:ea typeface="Arial"/>
               </a:rPr>
-              <a:t>"The Mitsue Taiken Koryukan — a community exchange center available for reuse — repurposed as a small, energy-efficient edge-compute facility — powered entirely by locally generated renewable energy. Phase 2 expands into a larger old factory building in Mitsue."</a:t>
+              <a:t>"Candidate sites: the Mitsue Taiken Koryukan — a community exchange center available for reuse — and other vacant buildings, including old factory sites, under evaluation for a small, energy-efficient edge-compute facility powered entirely by locally generated renewable energy."</a:t>
             </a:r>
             <a:endParaRPr lang="en-US" sz="1900" b="0" u="none" strike="noStrike">
               <a:solidFill>
@@ -17529,7 +17529,7 @@
                 <a:latin typeface="Courier New"/>
                 <a:ea typeface="Courier New"/>
               </a:rPr>
-              <a:t>07 / 11</a:t>
+              <a:t>07 / 12</a:t>
             </a:r>
             <a:endParaRPr lang="en-US" sz="1800" b="0" u="none" strike="noStrike">
               <a:solidFill>
@@ -18139,7 +18139,7 @@
                 <a:latin typeface="Arial"/>
                 <a:ea typeface="Arial"/>
               </a:rPr>
-              <a:t>↳ Paid forestry work, year-round</a:t>
+              <a:t>↳ Paid forestry work + co-op equipment upgrades</a:t>
             </a:r>
             <a:endParaRPr lang="en-US" sz="2100" b="0" u="none" strike="noStrike">
               <a:solidFill>
@@ -18247,7 +18247,7 @@
                 <a:latin typeface="Arial"/>
                 <a:ea typeface="Arial"/>
               </a:rPr>
-              <a:t>↳ Modest, accountable, village-owned</a:t>
+              <a:t>↳ Landowner payouts + a buyer for C/D-grade wood</a:t>
             </a:r>
             <a:endParaRPr lang="en-US" sz="2100" b="0" u="none" strike="noStrike">
               <a:solidFill>
@@ -18847,7 +18847,7 @@
                 <a:latin typeface="Courier New"/>
                 <a:ea typeface="Courier New"/>
               </a:rPr>
-              <a:t>08 / 11</a:t>
+              <a:t>08 / 12</a:t>
             </a:r>
             <a:endParaRPr lang="en-US" sz="1800" b="0" u="none" strike="noStrike">
               <a:solidFill>
@@ -19165,7 +19165,7 @@
                 <a:latin typeface="Courier New"/>
                 <a:ea typeface="Courier New"/>
               </a:rPr>
-              <a:t>§ 08 · WHERE WE ARE TODAY · MAY 2026</a:t>
+              <a:t>§ 08 · WHERE WE ARE TODAY · SEP 2026</a:t>
             </a:r>
             <a:endParaRPr lang="en-US" sz="1800" b="0" u="none" strike="noStrike">
               <a:solidFill>
@@ -19369,7 +19369,7 @@
                 <a:latin typeface="Arial"/>
                 <a:ea typeface="Arial"/>
               </a:rPr>
-              <a:t>Phase 0 is local trust-building, founding-team formation, and clean drafting of the charter. Self-funded, ¥0–0.5M. The work that matters right now is meetings, not announcements.</a:t>
+              <a:t>Phase 0 is local trust-building, advisory-board building, and funding-track scouting. Self-funded, ¥0–0.25M. The work that matters right now is meetings, not announcements.</a:t>
             </a:r>
             <a:endParaRPr lang="en-US" sz="2100" b="0" u="none" strike="noStrike">
               <a:solidFill>
@@ -19912,7 +19912,7 @@
                 <a:latin typeface="Arial"/>
                 <a:ea typeface="Arial"/>
               </a:rPr>
-              <a:t>Initial meeting with local forestry group (early 2026)</a:t>
+              <a:t>Mitsue Kanko, Forest Cooperative, more trees/Tenkawa meetings (May–Aug 2026)</a:t>
             </a:r>
             <a:endParaRPr lang="en-US" sz="1800" b="0" u="none" strike="noStrike">
               <a:solidFill>
@@ -19944,7 +19944,7 @@
                 <a:latin typeface="Arial"/>
                 <a:ea typeface="Arial"/>
               </a:rPr>
-              <a:t>Founding charter + implementation plan drafted</a:t>
+              <a:t>Founding charter, implementation &amp; EVM plans drafted (BAC ¥220M)</a:t>
             </a:r>
             <a:endParaRPr lang="en-US" sz="1800" b="0" u="none" strike="noStrike">
               <a:solidFill>
@@ -19976,7 +19976,7 @@
                 <a:latin typeface="Arial"/>
                 <a:ea typeface="Arial"/>
               </a:rPr>
-              <a:t>Phase / funding-gate flowchart published</a:t>
+              <a:t>GX地域共創 decarbonization subsidy inquiry submitted (Aug 2026)</a:t>
             </a:r>
             <a:endParaRPr lang="en-US" sz="1800" b="0" u="none" strike="noStrike">
               <a:solidFill>
@@ -20008,7 +20008,7 @@
                 <a:latin typeface="Arial"/>
                 <a:ea typeface="Arial"/>
               </a:rPr>
-              <a:t>Advisory commitments: Ray Ozzie, Takuo Dome</a:t>
+              <a:t>Advisory board grown to 11, incl. 3 pro bono legal advisors</a:t>
             </a:r>
             <a:endParaRPr lang="en-US" sz="1800" b="0" u="none" strike="noStrike">
               <a:solidFill>
@@ -20208,7 +20208,7 @@
                 <a:latin typeface="Arial"/>
                 <a:ea typeface="Arial"/>
               </a:rPr>
-              <a:t>Scheduling a formal meeting with the Village Mayor</a:t>
+              <a:t>Keeping the Village Mayor informed with project documents</a:t>
             </a:r>
             <a:endParaRPr lang="en-US" sz="1800" b="0" u="none" strike="noStrike">
               <a:solidFill>
@@ -20250,7 +20250,7 @@
                 <a:latin typeface="Arial"/>
                 <a:ea typeface="Arial"/>
               </a:rPr>
-              <a:t>一般社団法人</a:t>
+              <a:t>一般社団法人Mitsue-it</a:t>
             </a:r>
             <a:endParaRPr lang="en-US" sz="1800" b="0" u="none" strike="noStrike">
               <a:solidFill>
@@ -20502,7 +20502,7 @@
                 <a:latin typeface="Arial"/>
                 <a:ea typeface="Arial"/>
               </a:rPr>
-              <a:t>Hold informal meeting with the Village Mayor</a:t>
+              <a:t>Continue quiet outreach with village hall</a:t>
             </a:r>
             <a:endParaRPr lang="en-US" sz="1800" b="0" u="none" strike="noStrike">
               <a:solidFill>
@@ -20534,7 +20534,7 @@
                 <a:latin typeface="Arial"/>
                 <a:ea typeface="Arial"/>
               </a:rPr>
-              <a:t>Initial consultations with administrative scriveners</a:t>
+              <a:t>GX地域共創 Round 2 application (deadline Nov 30, 2026)</a:t>
             </a:r>
             <a:endParaRPr lang="en-US" sz="1800" b="0" u="none" strike="noStrike">
               <a:solidFill>
@@ -20566,7 +20566,7 @@
                 <a:latin typeface="Arial"/>
                 <a:ea typeface="Arial"/>
               </a:rPr>
-              <a:t>Finalise the two-page bilingual charter</a:t>
+              <a:t>Prep NAIST seminar (confirmed, Jan 13, 2027)</a:t>
             </a:r>
             <a:endParaRPr lang="en-US" sz="1800" b="0" u="none" strike="noStrike">
               <a:solidFill>
@@ -20624,7 +20624,7 @@
                 <a:latin typeface="Courier New"/>
                 <a:ea typeface="Courier New"/>
               </a:rPr>
-              <a:t>09 / 11</a:t>
+              <a:t>09 / 12</a:t>
             </a:r>
             <a:endParaRPr lang="en-US" sz="1800" b="0" u="none" strike="noStrike">
               <a:solidFill>
@@ -20682,7 +20682,7 @@
                 <a:latin typeface="Courier New"/>
                 <a:ea typeface="Courier New"/>
               </a:rPr>
-              <a:t>PHASE 0 · MONTHS 01–03 · SELF-FUNDED</a:t>
+              <a:t>PHASE 0 · MONTHS 01–06 · SELF-FUNDED</a:t>
             </a:r>
             <a:endParaRPr lang="en-US" sz="1800" b="0" u="none" strike="noStrike">
               <a:solidFill>

--- a/decks/Mitsue Project Presentation.pptx
+++ b/decks/Mitsue Project Presentation.pptx
@@ -2440,7 +2440,7 @@
                 </a:solidFill>
                 <a:latin typeface="Arial"/>
               </a:rPr>
-              <a:t>Where we are today, September 2026. Phase 0, intentionally quiet. Meetings with the Vice Mayor, the Forest Cooperative, Mitsue Kanko, and more trees/Tenkawa are done. The charter, implementation plan, and EVM plan are drafted. A GX地域共創 decarbonization subsidy inquiry is submitted. T</a:t>
+              <a:t>Where we are today, September 2026. Phase 0, intentionally quiet. Meetings with the Vice Mayor, a local forestry partner, Mitsue Kanko, and more trees/Tenkawa are done. The charter, implementation plan, and EVM plan are drafted. A GX地域共創 decarbonization subsidy inquiry is submitted. T</a:t>
             </a:r>
             <a:r>
               <a:rPr lang="en-US" sz="2000" b="0" u="none" strike="noStrike">
@@ -19912,7 +19912,7 @@
                 <a:latin typeface="Arial"/>
                 <a:ea typeface="Arial"/>
               </a:rPr>
-              <a:t>Mitsue Kanko, Forest Cooperative, more trees/Tenkawa meetings (May–Aug 2026)</a:t>
+              <a:t>Mitsue Kanko, local forestry partner, more trees/Tenkawa meetings (May–Aug 2026)</a:t>
             </a:r>
             <a:endParaRPr lang="en-US" sz="1800" b="0" u="none" strike="noStrike">
               <a:solidFill>
